--- a/data-raw/doc/plaatjes/Afvoer de Beerze 1 maal per 100 jaar TN=2uur.pptx
+++ b/data-raw/doc/plaatjes/Afvoer de Beerze 1 maal per 100 jaar TN=2uur.pptx
@@ -127,7 +127,7 @@
 <file path=ppt/revisionInfo.xml><?xml version="1.0" encoding="utf-8"?>
 <p1510:revInfo xmlns:a="http://schemas.openxmlformats.org/drawingml/2006/main" xmlns:r="http://schemas.openxmlformats.org/officeDocument/2006/relationships" xmlns:p1510="http://schemas.microsoft.com/office/powerpoint/2015/10/main">
   <p1510:revLst>
-    <p1510:client id="{A71950C6-FD9F-41D6-ABDD-4812B3B4153F}" v="12" dt="2025-01-21T09:48:53.100"/>
+    <p1510:client id="{A71950C6-FD9F-41D6-ABDD-4812B3B4153F}" v="13" dt="2025-01-21T16:34:10.653"/>
   </p1510:revLst>
 </p1510:revInfo>
 </file>
@@ -137,12 +137,12 @@
   <pc:docChgLst>
     <pc:chgData name="Kees van Immerzeel" userId="7fa01722dbc575f3" providerId="LiveId" clId="{A71950C6-FD9F-41D6-ABDD-4812B3B4153F}"/>
     <pc:docChg chg="undo custSel addSld modSld">
-      <pc:chgData name="Kees van Immerzeel" userId="7fa01722dbc575f3" providerId="LiveId" clId="{A71950C6-FD9F-41D6-ABDD-4812B3B4153F}" dt="2025-01-21T09:52:00.467" v="125" actId="1076"/>
+      <pc:chgData name="Kees van Immerzeel" userId="7fa01722dbc575f3" providerId="LiveId" clId="{A71950C6-FD9F-41D6-ABDD-4812B3B4153F}" dt="2025-01-21T16:35:23.539" v="148" actId="1076"/>
       <pc:docMkLst>
         <pc:docMk/>
       </pc:docMkLst>
-      <pc:sldChg chg="modSp mod">
-        <pc:chgData name="Kees van Immerzeel" userId="7fa01722dbc575f3" providerId="LiveId" clId="{A71950C6-FD9F-41D6-ABDD-4812B3B4153F}" dt="2025-01-21T09:46:44.577" v="26" actId="14826"/>
+      <pc:sldChg chg="addSp delSp modSp mod">
+        <pc:chgData name="Kees van Immerzeel" userId="7fa01722dbc575f3" providerId="LiveId" clId="{A71950C6-FD9F-41D6-ABDD-4812B3B4153F}" dt="2025-01-21T16:35:23.539" v="148" actId="1076"/>
         <pc:sldMkLst>
           <pc:docMk/>
           <pc:sldMk cId="1627134945" sldId="257"/>
@@ -171,6 +171,38 @@
             <ac:spMk id="9" creationId="{EAE87C84-2FD1-19CB-9F06-BC90DF1839FA}"/>
           </ac:spMkLst>
         </pc:spChg>
+        <pc:grpChg chg="mod">
+          <ac:chgData name="Kees van Immerzeel" userId="7fa01722dbc575f3" providerId="LiveId" clId="{A71950C6-FD9F-41D6-ABDD-4812B3B4153F}" dt="2025-01-21T16:34:33.073" v="141" actId="1076"/>
+          <ac:grpSpMkLst>
+            <pc:docMk/>
+            <pc:sldMk cId="1627134945" sldId="257"/>
+            <ac:grpSpMk id="12" creationId="{2974B8B4-AA1E-2160-2E8F-061D2E9998E0}"/>
+          </ac:grpSpMkLst>
+        </pc:grpChg>
+        <pc:grpChg chg="mod">
+          <ac:chgData name="Kees van Immerzeel" userId="7fa01722dbc575f3" providerId="LiveId" clId="{A71950C6-FD9F-41D6-ABDD-4812B3B4153F}" dt="2025-01-21T16:33:49.374" v="132" actId="1076"/>
+          <ac:grpSpMkLst>
+            <pc:docMk/>
+            <pc:sldMk cId="1627134945" sldId="257"/>
+            <ac:grpSpMk id="13" creationId="{008A9B5D-650B-5807-0230-A7FAC0AEBF60}"/>
+          </ac:grpSpMkLst>
+        </pc:grpChg>
+        <pc:grpChg chg="mod">
+          <ac:chgData name="Kees van Immerzeel" userId="7fa01722dbc575f3" providerId="LiveId" clId="{A71950C6-FD9F-41D6-ABDD-4812B3B4153F}" dt="2025-01-21T16:35:23.539" v="148" actId="1076"/>
+          <ac:grpSpMkLst>
+            <pc:docMk/>
+            <pc:sldMk cId="1627134945" sldId="257"/>
+            <ac:grpSpMk id="14" creationId="{FBC2AFFF-C395-320F-35F7-6693DA22D28F}"/>
+          </ac:grpSpMkLst>
+        </pc:grpChg>
+        <pc:picChg chg="add del mod">
+          <ac:chgData name="Kees van Immerzeel" userId="7fa01722dbc575f3" providerId="LiveId" clId="{A71950C6-FD9F-41D6-ABDD-4812B3B4153F}" dt="2025-01-21T16:35:12.912" v="147" actId="478"/>
+          <ac:picMkLst>
+            <pc:docMk/>
+            <pc:sldMk cId="1627134945" sldId="257"/>
+            <ac:picMk id="2" creationId="{6F55EA57-9ABE-0E51-C483-3CAECC149D06}"/>
+          </ac:picMkLst>
+        </pc:picChg>
         <pc:picChg chg="mod">
           <ac:chgData name="Kees van Immerzeel" userId="7fa01722dbc575f3" providerId="LiveId" clId="{A71950C6-FD9F-41D6-ABDD-4812B3B4153F}" dt="2025-01-21T09:43:26.263" v="18" actId="14826"/>
           <ac:picMkLst>
@@ -180,7 +212,7 @@
           </ac:picMkLst>
         </pc:picChg>
         <pc:picChg chg="mod">
-          <ac:chgData name="Kees van Immerzeel" userId="7fa01722dbc575f3" providerId="LiveId" clId="{A71950C6-FD9F-41D6-ABDD-4812B3B4153F}" dt="2025-01-21T09:46:44.577" v="26" actId="14826"/>
+          <ac:chgData name="Kees van Immerzeel" userId="7fa01722dbc575f3" providerId="LiveId" clId="{A71950C6-FD9F-41D6-ABDD-4812B3B4153F}" dt="2025-01-21T16:34:56.533" v="144" actId="14100"/>
           <ac:picMkLst>
             <pc:docMk/>
             <pc:sldMk cId="1627134945" sldId="257"/>
@@ -3605,7 +3637,7 @@
         </p:nvGrpSpPr>
         <p:grpSpPr>
           <a:xfrm>
-            <a:off x="0" y="74591"/>
+            <a:off x="5681" y="0"/>
             <a:ext cx="3456587" cy="6610344"/>
             <a:chOff x="0" y="74591"/>
             <a:chExt cx="3456587" cy="6610344"/>
@@ -3696,7 +3728,7 @@
         </p:nvGrpSpPr>
         <p:grpSpPr>
           <a:xfrm>
-            <a:off x="3621602" y="98474"/>
+            <a:off x="3347884" y="165680"/>
             <a:ext cx="3401290" cy="6759526"/>
             <a:chOff x="2396534" y="49237"/>
             <a:chExt cx="3401290" cy="6759526"/>
@@ -3787,7 +3819,7 @@
         </p:nvGrpSpPr>
         <p:grpSpPr>
           <a:xfrm>
-            <a:off x="7213179" y="98474"/>
+            <a:off x="6745057" y="165680"/>
             <a:ext cx="3154543" cy="6308597"/>
             <a:chOff x="5019390" y="102252"/>
             <a:chExt cx="3154543" cy="6308597"/>
@@ -3891,8 +3923,8 @@
         </p:blipFill>
         <p:spPr>
           <a:xfrm>
-            <a:off x="10624614" y="4193221"/>
-            <a:ext cx="1346253" cy="2484663"/>
+            <a:off x="10057703" y="3168901"/>
+            <a:ext cx="1885989" cy="3480807"/>
           </a:xfrm>
           <a:prstGeom prst="rect">
             <a:avLst/>
